--- a/template_esempio.pptx
+++ b/template_esempio.pptx
@@ -3188,7 +3188,7 @@
         <p:spPr>
           <a:xfrm>
             <a:off x="502920" y="475488"/>
-            <a:ext cx="10058400" cy="731520"/>
+            <a:ext cx="11201400" cy="731520"/>
           </a:xfrm>
           <a:prstGeom prst="rect">
             <a:avLst/>
@@ -3209,7 +3209,7 @@
                 </a:solidFill>
                 <a:latin typeface="Calibri"/>
               </a:rPr>
-              <a:t>PANORAMICA</a:t>
+              <a:t>LIVELLO GENERALE MATURITÀ</a:t>
             </a:r>
           </a:p>
         </p:txBody>
@@ -3222,29 +3222,29 @@
         </p:nvSpPr>
         <p:spPr>
           <a:xfrm>
-            <a:off x="502920" y="1078992"/>
-            <a:ext cx="10515600" cy="365760"/>
-          </a:xfrm>
-          <a:prstGeom prst="rect">
-            <a:avLst/>
-          </a:prstGeom>
-          <a:noFill/>
-        </p:spPr>
-        <p:txBody>
-          <a:bodyPr wrap="square" anchor="t" lIns="0" rIns="0" tIns="0" bIns="0">
-            <a:spAutoFit/>
-          </a:bodyPr>
-          <a:lstStyle/>
-          <a:p>
-            <a:pPr algn="l"/>
-            <a:r>
-              <a:rPr sz="1300" b="0">
+            <a:off x="502920" y="1600200"/>
+            <a:ext cx="4937760" cy="365760"/>
+          </a:xfrm>
+          <a:prstGeom prst="rect">
+            <a:avLst/>
+          </a:prstGeom>
+          <a:noFill/>
+        </p:spPr>
+        <p:txBody>
+          <a:bodyPr wrap="square" anchor="t" lIns="0" rIns="0" tIns="0" bIns="0">
+            <a:spAutoFit/>
+          </a:bodyPr>
+          <a:lstStyle/>
+          <a:p>
+            <a:pPr algn="l"/>
+            <a:r>
+              <a:rPr sz="1400" b="1">
                 <a:solidFill>
                   <a:srgbClr val="555555"/>
                 </a:solidFill>
                 <a:latin typeface="Calibri"/>
               </a:rPr>
-              <a:t>Livello di maturità DEIA aggregato sull'intero assessment</a:t>
+              <a:t>AREA</a:t>
             </a:r>
           </a:p>
         </p:txBody>
@@ -3257,112 +3257,42 @@
         </p:nvSpPr>
         <p:spPr>
           <a:xfrm>
-            <a:off x="502920" y="2148840"/>
-            <a:ext cx="5486400" cy="320040"/>
-          </a:xfrm>
-          <a:prstGeom prst="rect">
-            <a:avLst/>
-          </a:prstGeom>
-          <a:noFill/>
-        </p:spPr>
-        <p:txBody>
-          <a:bodyPr wrap="square" anchor="t" lIns="0" rIns="0" tIns="0" bIns="0">
-            <a:spAutoFit/>
-          </a:bodyPr>
-          <a:lstStyle/>
-          <a:p>
-            <a:pPr algn="l"/>
-            <a:r>
-              <a:rPr sz="1300" b="1">
-                <a:solidFill>
-                  <a:srgbClr val="1A1A1A"/>
-                </a:solidFill>
-                <a:latin typeface="Calibri"/>
-              </a:rPr>
-              <a:t>LIVELLO MACRO</a:t>
-            </a:r>
-          </a:p>
-        </p:txBody>
-      </p:sp>
-      <p:sp>
-        <p:nvSpPr>
-          <p:cNvPr id="6" name="TextBox 5"/>
-          <p:cNvSpPr txBox="1"/>
-          <p:nvPr/>
-        </p:nvSpPr>
-        <p:spPr>
-          <a:xfrm>
-            <a:off x="502920" y="2542032"/>
-            <a:ext cx="8686800" cy="1371600"/>
-          </a:xfrm>
-          <a:prstGeom prst="rect">
-            <a:avLst/>
-          </a:prstGeom>
-          <a:noFill/>
-        </p:spPr>
-        <p:txBody>
-          <a:bodyPr wrap="square" anchor="t" lIns="0" rIns="0" tIns="0" bIns="0">
-            <a:spAutoFit/>
-          </a:bodyPr>
-          <a:lstStyle/>
-          <a:p>
-            <a:pPr algn="l"/>
-            <a:r>
-              <a:rPr sz="4600" b="1">
-                <a:solidFill>
-                  <a:srgbClr val="1A1A1A"/>
-                </a:solidFill>
-                <a:latin typeface="Calibri"/>
-              </a:rPr>
-              <a:t>{{panoramica.risultato}}</a:t>
-            </a:r>
-          </a:p>
-        </p:txBody>
-      </p:sp>
-      <p:sp>
-        <p:nvSpPr>
-          <p:cNvPr id="7" name="TextBox 6"/>
-          <p:cNvSpPr txBox="1"/>
-          <p:nvPr/>
-        </p:nvSpPr>
-        <p:spPr>
-          <a:xfrm>
-            <a:off x="502920" y="3977639"/>
-            <a:ext cx="5486400" cy="457200"/>
-          </a:xfrm>
-          <a:prstGeom prst="rect">
-            <a:avLst/>
-          </a:prstGeom>
-          <a:noFill/>
-        </p:spPr>
-        <p:txBody>
-          <a:bodyPr wrap="square" anchor="t" lIns="0" rIns="0" tIns="0" bIns="0">
-            <a:spAutoFit/>
-          </a:bodyPr>
-          <a:lstStyle/>
-          <a:p>
-            <a:pPr algn="l"/>
-            <a:r>
-              <a:rPr sz="1800" b="0">
+            <a:off x="5486400" y="1600200"/>
+            <a:ext cx="5486400" cy="365760"/>
+          </a:xfrm>
+          <a:prstGeom prst="rect">
+            <a:avLst/>
+          </a:prstGeom>
+          <a:noFill/>
+        </p:spPr>
+        <p:txBody>
+          <a:bodyPr wrap="square" anchor="t" lIns="0" rIns="0" tIns="0" bIns="0">
+            <a:spAutoFit/>
+          </a:bodyPr>
+          <a:lstStyle/>
+          <a:p>
+            <a:pPr algn="l"/>
+            <a:r>
+              <a:rPr sz="1400" b="1">
                 <a:solidFill>
                   <a:srgbClr val="555555"/>
                 </a:solidFill>
                 <a:latin typeface="Calibri"/>
               </a:rPr>
-              <a:t>{{panoramica.livello_medio}}</a:t>
-            </a:r>
-          </a:p>
-        </p:txBody>
-      </p:sp>
-      <p:sp>
-        <p:nvSpPr>
-          <p:cNvPr id="8" name="Rectangle 7"/>
+              <a:t>RISULTATO</a:t>
+            </a:r>
+          </a:p>
+        </p:txBody>
+      </p:sp>
+      <p:sp>
+        <p:nvSpPr>
+          <p:cNvPr id="6" name="Rectangle 5"/>
           <p:cNvSpPr/>
           <p:nvPr/>
         </p:nvSpPr>
         <p:spPr>
           <a:xfrm>
-            <a:off x="502920" y="4709160"/>
+            <a:off x="502920" y="2011680"/>
             <a:ext cx="11201400" cy="9525"/>
           </a:xfrm>
           <a:prstGeom prst="rect">
@@ -3399,36 +3329,114 @@
       </p:sp>
       <p:sp>
         <p:nvSpPr>
-          <p:cNvPr id="9" name="TextBox 8"/>
-          <p:cNvSpPr txBox="1"/>
-          <p:nvPr/>
-        </p:nvSpPr>
-        <p:spPr>
-          <a:xfrm>
-            <a:off x="502920" y="4892040"/>
-            <a:ext cx="11201400" cy="320040"/>
-          </a:xfrm>
-          <a:prstGeom prst="rect">
-            <a:avLst/>
-          </a:prstGeom>
-          <a:noFill/>
-        </p:spPr>
-        <p:txBody>
-          <a:bodyPr wrap="square" anchor="t" lIns="0" rIns="0" tIns="0" bIns="0">
-            <a:spAutoFit/>
-          </a:bodyPr>
-          <a:lstStyle/>
-          <a:p>
-            <a:pPr algn="l"/>
-            <a:r>
-              <a:rPr sz="1300" b="1">
+          <p:cNvPr id="7" name="TextBox 6"/>
+          <p:cNvSpPr txBox="1"/>
+          <p:nvPr/>
+        </p:nvSpPr>
+        <p:spPr>
+          <a:xfrm>
+            <a:off x="502920" y="2240280"/>
+            <a:ext cx="4937760" cy="822960"/>
+          </a:xfrm>
+          <a:prstGeom prst="rect">
+            <a:avLst/>
+          </a:prstGeom>
+          <a:noFill/>
+        </p:spPr>
+        <p:txBody>
+          <a:bodyPr wrap="square" anchor="t" lIns="0" rIns="0" tIns="0" bIns="0">
+            <a:spAutoFit/>
+          </a:bodyPr>
+          <a:lstStyle/>
+          <a:p>
+            <a:pPr algn="l"/>
+            <a:r>
+              <a:rPr sz="2000" b="1">
                 <a:solidFill>
                   <a:srgbClr val="1A1A1A"/>
                 </a:solidFill>
                 <a:latin typeface="Calibri"/>
               </a:rPr>
-              <a:t>COSA SIGNIFICA</a:t>
-            </a:r>
+              <a:t>STRATEGIA</a:t>
+            </a:r>
+          </a:p>
+        </p:txBody>
+      </p:sp>
+      <p:sp>
+        <p:nvSpPr>
+          <p:cNvPr id="8" name="TextBox 7"/>
+          <p:cNvSpPr txBox="1"/>
+          <p:nvPr/>
+        </p:nvSpPr>
+        <p:spPr>
+          <a:xfrm>
+            <a:off x="5486400" y="2240280"/>
+            <a:ext cx="5486400" cy="822960"/>
+          </a:xfrm>
+          <a:prstGeom prst="rect">
+            <a:avLst/>
+          </a:prstGeom>
+          <a:noFill/>
+        </p:spPr>
+        <p:txBody>
+          <a:bodyPr wrap="square" anchor="t" lIns="0" rIns="0" tIns="0" bIns="0">
+            <a:spAutoFit/>
+          </a:bodyPr>
+          <a:lstStyle/>
+          <a:p>
+            <a:pPr algn="l"/>
+            <a:r>
+              <a:rPr sz="2000" b="0">
+                <a:solidFill>
+                  <a:srgbClr val="555555"/>
+                </a:solidFill>
+                <a:latin typeface="Calibri"/>
+              </a:rPr>
+              <a:t>{{strategia.risultato}}</a:t>
+            </a:r>
+          </a:p>
+        </p:txBody>
+      </p:sp>
+      <p:sp>
+        <p:nvSpPr>
+          <p:cNvPr id="9" name="Rectangle 8"/>
+          <p:cNvSpPr/>
+          <p:nvPr/>
+        </p:nvSpPr>
+        <p:spPr>
+          <a:xfrm>
+            <a:off x="502920" y="3017520"/>
+            <a:ext cx="11201400" cy="9525"/>
+          </a:xfrm>
+          <a:prstGeom prst="rect">
+            <a:avLst/>
+          </a:prstGeom>
+          <a:solidFill>
+            <a:srgbClr val="CCCCCC"/>
+          </a:solidFill>
+          <a:ln>
+            <a:noFill/>
+          </a:ln>
+        </p:spPr>
+        <p:style>
+          <a:lnRef idx="1">
+            <a:schemeClr val="accent1"/>
+          </a:lnRef>
+          <a:fillRef idx="3">
+            <a:schemeClr val="accent1"/>
+          </a:fillRef>
+          <a:effectRef idx="2">
+            <a:schemeClr val="accent1"/>
+          </a:effectRef>
+          <a:fontRef idx="minor">
+            <a:schemeClr val="lt1"/>
+          </a:fontRef>
+        </p:style>
+        <p:txBody>
+          <a:bodyPr rtlCol="0" anchor="ctr"/>
+          <a:lstStyle/>
+          <a:p>
+            <a:pPr algn="ctr"/>
           </a:p>
         </p:txBody>
       </p:sp>
@@ -3440,30 +3448,334 @@
         </p:nvSpPr>
         <p:spPr>
           <a:xfrm>
-            <a:off x="502920" y="5257800"/>
-            <a:ext cx="11201400" cy="1371600"/>
-          </a:xfrm>
-          <a:prstGeom prst="rect">
-            <a:avLst/>
-          </a:prstGeom>
-          <a:noFill/>
-        </p:spPr>
-        <p:txBody>
-          <a:bodyPr wrap="square" anchor="t" lIns="0" rIns="0" tIns="0" bIns="0">
-            <a:spAutoFit/>
-          </a:bodyPr>
-          <a:lstStyle/>
-          <a:p>
-            <a:pPr algn="l"/>
-            <a:r>
-              <a:rPr sz="1200" b="0">
+            <a:off x="502920" y="3063240"/>
+            <a:ext cx="4937760" cy="822960"/>
+          </a:xfrm>
+          <a:prstGeom prst="rect">
+            <a:avLst/>
+          </a:prstGeom>
+          <a:noFill/>
+        </p:spPr>
+        <p:txBody>
+          <a:bodyPr wrap="square" anchor="t" lIns="0" rIns="0" tIns="0" bIns="0">
+            <a:spAutoFit/>
+          </a:bodyPr>
+          <a:lstStyle/>
+          <a:p>
+            <a:pPr algn="l"/>
+            <a:r>
+              <a:rPr sz="2000" b="1">
+                <a:solidFill>
+                  <a:srgbClr val="1A1A1A"/>
+                </a:solidFill>
+                <a:latin typeface="Calibri"/>
+              </a:rPr>
+              <a:t>CULTURA</a:t>
+            </a:r>
+          </a:p>
+        </p:txBody>
+      </p:sp>
+      <p:sp>
+        <p:nvSpPr>
+          <p:cNvPr id="11" name="TextBox 10"/>
+          <p:cNvSpPr txBox="1"/>
+          <p:nvPr/>
+        </p:nvSpPr>
+        <p:spPr>
+          <a:xfrm>
+            <a:off x="5486400" y="3063240"/>
+            <a:ext cx="5486400" cy="822960"/>
+          </a:xfrm>
+          <a:prstGeom prst="rect">
+            <a:avLst/>
+          </a:prstGeom>
+          <a:noFill/>
+        </p:spPr>
+        <p:txBody>
+          <a:bodyPr wrap="square" anchor="t" lIns="0" rIns="0" tIns="0" bIns="0">
+            <a:spAutoFit/>
+          </a:bodyPr>
+          <a:lstStyle/>
+          <a:p>
+            <a:pPr algn="l"/>
+            <a:r>
+              <a:rPr sz="2000" b="0">
                 <a:solidFill>
                   <a:srgbClr val="555555"/>
                 </a:solidFill>
                 <a:latin typeface="Calibri"/>
               </a:rPr>
-              <a:t>{{panoramica.descrizione}}</a:t>
-            </a:r>
+              <a:t>{{cultura.risultato}}</a:t>
+            </a:r>
+          </a:p>
+        </p:txBody>
+      </p:sp>
+      <p:sp>
+        <p:nvSpPr>
+          <p:cNvPr id="12" name="Rectangle 11"/>
+          <p:cNvSpPr/>
+          <p:nvPr/>
+        </p:nvSpPr>
+        <p:spPr>
+          <a:xfrm>
+            <a:off x="502920" y="3840480"/>
+            <a:ext cx="11201400" cy="9525"/>
+          </a:xfrm>
+          <a:prstGeom prst="rect">
+            <a:avLst/>
+          </a:prstGeom>
+          <a:solidFill>
+            <a:srgbClr val="CCCCCC"/>
+          </a:solidFill>
+          <a:ln>
+            <a:noFill/>
+          </a:ln>
+        </p:spPr>
+        <p:style>
+          <a:lnRef idx="1">
+            <a:schemeClr val="accent1"/>
+          </a:lnRef>
+          <a:fillRef idx="3">
+            <a:schemeClr val="accent1"/>
+          </a:fillRef>
+          <a:effectRef idx="2">
+            <a:schemeClr val="accent1"/>
+          </a:effectRef>
+          <a:fontRef idx="minor">
+            <a:schemeClr val="lt1"/>
+          </a:fontRef>
+        </p:style>
+        <p:txBody>
+          <a:bodyPr rtlCol="0" anchor="ctr"/>
+          <a:lstStyle/>
+          <a:p>
+            <a:pPr algn="ctr"/>
+          </a:p>
+        </p:txBody>
+      </p:sp>
+      <p:sp>
+        <p:nvSpPr>
+          <p:cNvPr id="13" name="TextBox 12"/>
+          <p:cNvSpPr txBox="1"/>
+          <p:nvPr/>
+        </p:nvSpPr>
+        <p:spPr>
+          <a:xfrm>
+            <a:off x="502920" y="3886200"/>
+            <a:ext cx="4937760" cy="822960"/>
+          </a:xfrm>
+          <a:prstGeom prst="rect">
+            <a:avLst/>
+          </a:prstGeom>
+          <a:noFill/>
+        </p:spPr>
+        <p:txBody>
+          <a:bodyPr wrap="square" anchor="t" lIns="0" rIns="0" tIns="0" bIns="0">
+            <a:spAutoFit/>
+          </a:bodyPr>
+          <a:lstStyle/>
+          <a:p>
+            <a:pPr algn="l"/>
+            <a:r>
+              <a:rPr sz="2000" b="1">
+                <a:solidFill>
+                  <a:srgbClr val="1A1A1A"/>
+                </a:solidFill>
+                <a:latin typeface="Calibri"/>
+              </a:rPr>
+              <a:t>PROCESSI</a:t>
+            </a:r>
+          </a:p>
+        </p:txBody>
+      </p:sp>
+      <p:sp>
+        <p:nvSpPr>
+          <p:cNvPr id="14" name="TextBox 13"/>
+          <p:cNvSpPr txBox="1"/>
+          <p:nvPr/>
+        </p:nvSpPr>
+        <p:spPr>
+          <a:xfrm>
+            <a:off x="5486400" y="3886200"/>
+            <a:ext cx="5486400" cy="822960"/>
+          </a:xfrm>
+          <a:prstGeom prst="rect">
+            <a:avLst/>
+          </a:prstGeom>
+          <a:noFill/>
+        </p:spPr>
+        <p:txBody>
+          <a:bodyPr wrap="square" anchor="t" lIns="0" rIns="0" tIns="0" bIns="0">
+            <a:spAutoFit/>
+          </a:bodyPr>
+          <a:lstStyle/>
+          <a:p>
+            <a:pPr algn="l"/>
+            <a:r>
+              <a:rPr sz="2000" b="0">
+                <a:solidFill>
+                  <a:srgbClr val="555555"/>
+                </a:solidFill>
+                <a:latin typeface="Calibri"/>
+              </a:rPr>
+              <a:t>{{processi.risultato}}</a:t>
+            </a:r>
+          </a:p>
+        </p:txBody>
+      </p:sp>
+      <p:sp>
+        <p:nvSpPr>
+          <p:cNvPr id="15" name="Rectangle 14"/>
+          <p:cNvSpPr/>
+          <p:nvPr/>
+        </p:nvSpPr>
+        <p:spPr>
+          <a:xfrm>
+            <a:off x="502920" y="4663440"/>
+            <a:ext cx="11201400" cy="9525"/>
+          </a:xfrm>
+          <a:prstGeom prst="rect">
+            <a:avLst/>
+          </a:prstGeom>
+          <a:solidFill>
+            <a:srgbClr val="CCCCCC"/>
+          </a:solidFill>
+          <a:ln>
+            <a:noFill/>
+          </a:ln>
+        </p:spPr>
+        <p:style>
+          <a:lnRef idx="1">
+            <a:schemeClr val="accent1"/>
+          </a:lnRef>
+          <a:fillRef idx="3">
+            <a:schemeClr val="accent1"/>
+          </a:fillRef>
+          <a:effectRef idx="2">
+            <a:schemeClr val="accent1"/>
+          </a:effectRef>
+          <a:fontRef idx="minor">
+            <a:schemeClr val="lt1"/>
+          </a:fontRef>
+        </p:style>
+        <p:txBody>
+          <a:bodyPr rtlCol="0" anchor="ctr"/>
+          <a:lstStyle/>
+          <a:p>
+            <a:pPr algn="ctr"/>
+          </a:p>
+        </p:txBody>
+      </p:sp>
+      <p:sp>
+        <p:nvSpPr>
+          <p:cNvPr id="16" name="TextBox 15"/>
+          <p:cNvSpPr txBox="1"/>
+          <p:nvPr/>
+        </p:nvSpPr>
+        <p:spPr>
+          <a:xfrm>
+            <a:off x="502920" y="4709160"/>
+            <a:ext cx="4937760" cy="822960"/>
+          </a:xfrm>
+          <a:prstGeom prst="rect">
+            <a:avLst/>
+          </a:prstGeom>
+          <a:noFill/>
+        </p:spPr>
+        <p:txBody>
+          <a:bodyPr wrap="square" anchor="t" lIns="0" rIns="0" tIns="0" bIns="0">
+            <a:spAutoFit/>
+          </a:bodyPr>
+          <a:lstStyle/>
+          <a:p>
+            <a:pPr algn="l"/>
+            <a:r>
+              <a:rPr sz="2000" b="1">
+                <a:solidFill>
+                  <a:srgbClr val="1A1A1A"/>
+                </a:solidFill>
+                <a:latin typeface="Calibri"/>
+              </a:rPr>
+              <a:t>MERCATO</a:t>
+            </a:r>
+          </a:p>
+        </p:txBody>
+      </p:sp>
+      <p:sp>
+        <p:nvSpPr>
+          <p:cNvPr id="17" name="TextBox 16"/>
+          <p:cNvSpPr txBox="1"/>
+          <p:nvPr/>
+        </p:nvSpPr>
+        <p:spPr>
+          <a:xfrm>
+            <a:off x="5486400" y="4709160"/>
+            <a:ext cx="5486400" cy="822960"/>
+          </a:xfrm>
+          <a:prstGeom prst="rect">
+            <a:avLst/>
+          </a:prstGeom>
+          <a:noFill/>
+        </p:spPr>
+        <p:txBody>
+          <a:bodyPr wrap="square" anchor="t" lIns="0" rIns="0" tIns="0" bIns="0">
+            <a:spAutoFit/>
+          </a:bodyPr>
+          <a:lstStyle/>
+          <a:p>
+            <a:pPr algn="l"/>
+            <a:r>
+              <a:rPr sz="2000" b="0">
+                <a:solidFill>
+                  <a:srgbClr val="555555"/>
+                </a:solidFill>
+                <a:latin typeface="Calibri"/>
+              </a:rPr>
+              <a:t>{{mercato.risultato}}</a:t>
+            </a:r>
+          </a:p>
+        </p:txBody>
+      </p:sp>
+      <p:sp>
+        <p:nvSpPr>
+          <p:cNvPr id="18" name="Rectangle 17"/>
+          <p:cNvSpPr/>
+          <p:nvPr/>
+        </p:nvSpPr>
+        <p:spPr>
+          <a:xfrm>
+            <a:off x="502920" y="5486400"/>
+            <a:ext cx="11201400" cy="9525"/>
+          </a:xfrm>
+          <a:prstGeom prst="rect">
+            <a:avLst/>
+          </a:prstGeom>
+          <a:solidFill>
+            <a:srgbClr val="CCCCCC"/>
+          </a:solidFill>
+          <a:ln>
+            <a:noFill/>
+          </a:ln>
+        </p:spPr>
+        <p:style>
+          <a:lnRef idx="1">
+            <a:schemeClr val="accent1"/>
+          </a:lnRef>
+          <a:fillRef idx="3">
+            <a:schemeClr val="accent1"/>
+          </a:fillRef>
+          <a:effectRef idx="2">
+            <a:schemeClr val="accent1"/>
+          </a:effectRef>
+          <a:fontRef idx="minor">
+            <a:schemeClr val="lt1"/>
+          </a:fontRef>
+        </p:style>
+        <p:txBody>
+          <a:bodyPr rtlCol="0" anchor="ctr"/>
+          <a:lstStyle/>
+          <a:p>
+            <a:pPr algn="ctr"/>
           </a:p>
         </p:txBody>
       </p:sp>
